--- a/docs/WG立ち上げガイド/00_概要.pptx
+++ b/docs/WG立ち上げガイド/00_概要.pptx
@@ -684,7 +684,7 @@
           <a:p>
             <a:r>
               <a:rPr lang="en-US" dirty="0"/>
-              <a:t>リポジトリの設定と権限は運営が持ちます。WG のリーダーは、中身とレビュー、メンバーの出入りの連絡を受け持ちます。</a:t>
+              <a:t>リポジトリの設定と WG のチームは運営が持ちます。WG のリーダーは、中身とレビュー、メンバーの出入りの連絡を受け持ちます。</a:t>
             </a:r>
             <a:endParaRPr lang="en-US" dirty="0"/>
           </a:p>
@@ -948,7 +948,7 @@
           <a:p>
             <a:r>
               <a:rPr lang="en-US" dirty="0"/>
-              <a:t>WG 紹介の状態は「準備中」と「活動中」の2つです。メンバーは佛教大学の学生なので、卒業や退部で入れ替わります。権限の外し忘れがないよう、リーダーから運営に連絡してください。</a:t>
+              <a:t>WG 紹介の状態は「準備中」と「活動中」の2つです。メンバーは佛教大学の学生なので、卒業や退部で入れ替わります。チームや org からの外し忘れがないよう、リーダーから運営に連絡してください。</a:t>
             </a:r>
             <a:endParaRPr lang="en-US" dirty="0"/>
           </a:p>
@@ -3912,7 +3912,7 @@
                 <a:ea typeface="Meiryo" pitchFamily="34" charset="-122"/>
                 <a:cs typeface="Meiryo" pitchFamily="34" charset="-120"/>
               </a:rPr>
-              <a:t>メンバーの権限を付ける・外す</a:t>
+              <a:t>WG のチームとメンバーを管理する</a:t>
             </a:r>
             <a:endParaRPr lang="en-US" sz="1300" dirty="0"/>
           </a:p>
@@ -4613,7 +4613,7 @@
                 <a:ea typeface="Meiryo" pitchFamily="34" charset="-122"/>
                 <a:cs typeface="Meiryo" pitchFamily="34" charset="-120"/>
               </a:rPr>
-              <a:t>main のルールと権限</a:t>
+              <a:t>main のルールと WG のチーム</a:t>
             </a:r>
             <a:endParaRPr lang="en-US" sz="1050" dirty="0"/>
           </a:p>
@@ -6716,7 +6716,7 @@
                 <a:ea typeface="Meiryo" pitchFamily="34" charset="-122"/>
                 <a:cs typeface="Meiryo" pitchFamily="34" charset="-120"/>
               </a:rPr>
-              <a:t>卒業・退部したら権限を外す。リーダーから運営に連絡する。</a:t>
+              <a:t>人の出入りは WG のチームで。リーダーから運営に連絡する。</a:t>
             </a:r>
             <a:endParaRPr lang="en-US" sz="1100" dirty="0"/>
           </a:p>
@@ -6932,7 +6932,7 @@
                 <a:ea typeface="Meiryo" pitchFamily="34" charset="-122"/>
                 <a:cs typeface="Meiryo" pitchFamily="34" charset="-120"/>
               </a:rPr>
-              <a:t>状態の切り替え・権限・アーカイブは運営が行う（資料 01）。</a:t>
+              <a:t>状態の切り替え・チーム・アーカイブは運営が行う（資料 01）。</a:t>
             </a:r>
             <a:endParaRPr lang="en-US" sz="1050" dirty="0"/>
           </a:p>

--- a/docs/WG立ち上げガイド/00_概要.pptx
+++ b/docs/WG立ち上げガイド/00_概要.pptx
@@ -684,7 +684,7 @@
           <a:p>
             <a:r>
               <a:rPr lang="en-US" dirty="0"/>
-              <a:t>リポジトリの設定と WG のチームは運営が持ちます。WG のリーダーは、中身とレビュー、メンバーの出入りの連絡を受け持ちます。</a:t>
+              <a:t>WG への参加は、メンバー本人がサイトの「WG に参加」から行います（運営は触りません）。リポジトリとチームの用意、クラブの登録、抜けた人の後始末は運営が持ちます。WG のリーダーは、中身とレビューを受け持ちます。</a:t>
             </a:r>
             <a:endParaRPr lang="en-US" dirty="0"/>
           </a:p>
@@ -2936,7 +2936,7 @@
                 <a:ea typeface="Meiryo" pitchFamily="34" charset="-122"/>
                 <a:cs typeface="Meiryo" pitchFamily="34" charset="-120"/>
               </a:rPr>
-              <a:t>PC の準備</a:t>
+              <a:t>参加・準備</a:t>
             </a:r>
             <a:endParaRPr lang="en-US" sz="1600" dirty="0"/>
           </a:p>
@@ -2978,7 +2978,7 @@
                 <a:ea typeface="Meiryo" pitchFamily="34" charset="-122"/>
                 <a:cs typeface="Meiryo" pitchFamily="34" charset="-120"/>
               </a:rPr>
-              <a:t>VS Code と Docker Desktop を入れて開く</a:t>
+              <a:t>サイトの「WG に参加」で入り、パソコンを準備する</a:t>
             </a:r>
             <a:endParaRPr lang="en-US" sz="1100" dirty="0"/>
           </a:p>
@@ -3870,7 +3870,7 @@
                 <a:ea typeface="Meiryo" pitchFamily="34" charset="-122"/>
                 <a:cs typeface="Meiryo" pitchFamily="34" charset="-120"/>
               </a:rPr>
-              <a:t>テンプレートからリポジトリを作る</a:t>
+              <a:t>リポジトリとチームを作る</a:t>
             </a:r>
             <a:endParaRPr lang="en-US" sz="1300" dirty="0"/>
           </a:p>
@@ -3891,7 +3891,7 @@
                 <a:ea typeface="Meiryo" pitchFamily="34" charset="-122"/>
                 <a:cs typeface="Meiryo" pitchFamily="34" charset="-120"/>
               </a:rPr>
-              <a:t>main を守るルールを設定する</a:t>
+              <a:t>サイトに WG とチームを登録する</a:t>
             </a:r>
             <a:endParaRPr lang="en-US" sz="1300" dirty="0"/>
           </a:p>
@@ -3912,7 +3912,7 @@
                 <a:ea typeface="Meiryo" pitchFamily="34" charset="-122"/>
                 <a:cs typeface="Meiryo" pitchFamily="34" charset="-120"/>
               </a:rPr>
-              <a:t>WG のチームとメンバーを管理する</a:t>
+              <a:t>クラブの登録（Classroom）を管理する</a:t>
             </a:r>
             <a:endParaRPr lang="en-US" sz="1300" dirty="0"/>
           </a:p>
@@ -3933,7 +3933,7 @@
                 <a:ea typeface="Meiryo" pitchFamily="34" charset="-122"/>
                 <a:cs typeface="Meiryo" pitchFamily="34" charset="-120"/>
               </a:rPr>
-              <a:t>サイトの WG 紹介を更新する</a:t>
+              <a:t>抜けた人をチームから外す</a:t>
             </a:r>
             <a:endParaRPr lang="en-US" sz="1300" dirty="0"/>
           </a:p>
@@ -4117,7 +4117,7 @@
                 <a:ea typeface="Meiryo" pitchFamily="34" charset="-122"/>
                 <a:cs typeface="Meiryo" pitchFamily="34" charset="-120"/>
               </a:rPr>
-              <a:t>テーマとメンバーを決める</a:t>
+              <a:t>テーマと仲間を集める</a:t>
             </a:r>
             <a:endParaRPr lang="en-US" sz="1300" dirty="0"/>
           </a:p>
@@ -4180,7 +4180,7 @@
                 <a:ea typeface="Meiryo" pitchFamily="34" charset="-122"/>
                 <a:cs typeface="Meiryo" pitchFamily="34" charset="-120"/>
               </a:rPr>
-              <a:t>メンバーの出入りを運営に伝える</a:t>
+              <a:t>WG を抜けた人を運営に伝える</a:t>
             </a:r>
             <a:endParaRPr lang="en-US" sz="1300" dirty="0"/>
           </a:p>
@@ -4592,7 +4592,7 @@
                 <a:ea typeface="Meiryo" pitchFamily="34" charset="-122"/>
                 <a:cs typeface="Meiryo" pitchFamily="34" charset="-120"/>
               </a:rPr>
-              <a:t>テンプレートから作る</a:t>
+              <a:t>リポジトリとチームを作る</a:t>
             </a:r>
             <a:endParaRPr lang="en-US" sz="1050" dirty="0"/>
           </a:p>
@@ -4613,7 +4613,7 @@
                 <a:ea typeface="Meiryo" pitchFamily="34" charset="-122"/>
                 <a:cs typeface="Meiryo" pitchFamily="34" charset="-120"/>
               </a:rPr>
-              <a:t>main のルールと WG のチーム</a:t>
+              <a:t>サイトへの登録</a:t>
             </a:r>
             <a:endParaRPr lang="en-US" sz="1050" dirty="0"/>
           </a:p>
@@ -4634,7 +4634,7 @@
                 <a:ea typeface="Meiryo" pitchFamily="34" charset="-122"/>
                 <a:cs typeface="Meiryo" pitchFamily="34" charset="-120"/>
               </a:rPr>
-              <a:t>サイトへの掲載</a:t>
+              <a:t>参加のしくみ</a:t>
             </a:r>
             <a:endParaRPr lang="en-US" sz="1050" dirty="0"/>
           </a:p>
@@ -4936,7 +4936,7 @@
                 <a:ea typeface="Meiryo" pitchFamily="34" charset="-122"/>
                 <a:cs typeface="Meiryo" pitchFamily="34" charset="-120"/>
               </a:rPr>
-              <a:t>パソコンに入れる 3 つのアプリ</a:t>
+              <a:t>サイトから WG に参加する</a:t>
             </a:r>
             <a:endParaRPr lang="en-US" sz="1050" dirty="0"/>
           </a:p>
@@ -4957,7 +4957,7 @@
                 <a:ea typeface="Meiryo" pitchFamily="34" charset="-122"/>
                 <a:cs typeface="Meiryo" pitchFamily="34" charset="-120"/>
               </a:rPr>
-              <a:t>インストールの 7 つの手順</a:t>
+              <a:t>パソコンに入れる 3 つのアプリ</a:t>
             </a:r>
             <a:endParaRPr lang="en-US" sz="1050" dirty="0"/>
           </a:p>
@@ -4978,7 +4978,7 @@
                 <a:ea typeface="Meiryo" pitchFamily="34" charset="-122"/>
                 <a:cs typeface="Meiryo" pitchFamily="34" charset="-120"/>
               </a:rPr>
-              <a:t>サイトを起動して確かめる</a:t>
+              <a:t>インストールの手順</a:t>
             </a:r>
             <a:endParaRPr lang="en-US" sz="1050" dirty="0"/>
           </a:p>
@@ -6362,7 +6362,7 @@
                 <a:ea typeface="Meiryo" pitchFamily="34" charset="-122"/>
                 <a:cs typeface="Meiryo" pitchFamily="34" charset="-120"/>
               </a:rPr>
-              <a:t>サイトの WG 一覧に「準備中」で載る。参加ボタンだけ出る。</a:t>
+              <a:t>サイトの WG 一覧に「準備中」で載る。「WG に参加」で入れる。</a:t>
             </a:r>
             <a:endParaRPr lang="en-US" sz="1100" dirty="0"/>
           </a:p>
@@ -6716,7 +6716,7 @@
                 <a:ea typeface="Meiryo" pitchFamily="34" charset="-122"/>
                 <a:cs typeface="Meiryo" pitchFamily="34" charset="-120"/>
               </a:rPr>
-              <a:t>人の出入りは WG のチームで。リーダーから運営に連絡する。</a:t>
+              <a:t>入るのは本人が「WG に参加」から。抜けた人は運営が外す。</a:t>
             </a:r>
             <a:endParaRPr lang="en-US" sz="1100" dirty="0"/>
           </a:p>

--- a/docs/WG立ち上げガイド/00_概要.pptx
+++ b/docs/WG立ち上げガイド/00_概要.pptx
@@ -596,7 +596,7 @@
           <a:p>
             <a:r>
               <a:rPr lang="en-US" dirty="0"/>
-              <a:t>各ステップの詳しい手順は、カードの下に書いた資料にあります。05 の公開は、アプリを動かす場所を運営が用意して一緒に進めます（準備中）。</a:t>
+              <a:t>WG は立ち上がった時点で、アプリがまだでも「準備中」としてサイトに載せます。掲示しておくと、ほかのメンバーが活動を知って参加できます。アプリを動かす場所の用意は準備中で、できたら状態を「活動中」に変えます。</a:t>
             </a:r>
             <a:endParaRPr lang="en-US" dirty="0"/>
           </a:p>
@@ -2679,7 +2679,7 @@
                 <a:ea typeface="Meiryo" pitchFamily="34" charset="-122"/>
                 <a:cs typeface="Meiryo" pitchFamily="34" charset="-120"/>
               </a:rPr>
-              <a:t>リポジトリ</a:t>
+              <a:t>載せる</a:t>
             </a:r>
             <a:endParaRPr lang="en-US" sz="1600" dirty="0"/>
           </a:p>
@@ -2721,7 +2721,7 @@
                 <a:ea typeface="Meiryo" pitchFamily="34" charset="-122"/>
                 <a:cs typeface="Meiryo" pitchFamily="34" charset="-120"/>
               </a:rPr>
-              <a:t>運営がテンプレートから WG のリポジトリを作る</a:t>
+              <a:t>運営がサイトに「準備中」で載せる。すぐに載る</a:t>
             </a:r>
             <a:endParaRPr lang="en-US" sz="1100" dirty="0"/>
           </a:p>
@@ -2936,7 +2936,7 @@
                 <a:ea typeface="Meiryo" pitchFamily="34" charset="-122"/>
                 <a:cs typeface="Meiryo" pitchFamily="34" charset="-120"/>
               </a:rPr>
-              <a:t>参加・準備</a:t>
+              <a:t>用意する</a:t>
             </a:r>
             <a:endParaRPr lang="en-US" sz="1600" dirty="0"/>
           </a:p>
@@ -2978,7 +2978,7 @@
                 <a:ea typeface="Meiryo" pitchFamily="34" charset="-122"/>
                 <a:cs typeface="Meiryo" pitchFamily="34" charset="-120"/>
               </a:rPr>
-              <a:t>サイトの「WG に参加」で入り、パソコンを準備する</a:t>
+              <a:t>運営がリポジトリとチームを作り、サイトにつなぐ</a:t>
             </a:r>
             <a:endParaRPr lang="en-US" sz="1100" dirty="0"/>
           </a:p>
@@ -3001,11 +3001,11 @@
             </a:avLst>
           </a:prstGeom>
           <a:solidFill>
-            <a:srgbClr val="5BB8FF"/>
+            <a:srgbClr val="001E3C"/>
           </a:solidFill>
           <a:ln w="12700">
             <a:solidFill>
-              <a:srgbClr val="5BB8FF"/>
+              <a:srgbClr val="001E3C"/>
             </a:solidFill>
             <a:prstDash val="solid"/>
           </a:ln>
@@ -3038,13 +3038,13 @@
             <a:r>
               <a:rPr lang="en-US" sz="900" b="1" dirty="0">
                 <a:solidFill>
-                  <a:srgbClr val="001E3C"/>
-                </a:solidFill>
-                <a:latin typeface="Meiryo" pitchFamily="34" charset="0"/>
-                <a:ea typeface="Meiryo" pitchFamily="34" charset="-122"/>
-                <a:cs typeface="Meiryo" pitchFamily="34" charset="-120"/>
-              </a:rPr>
-              <a:t>全員</a:t>
+                  <a:srgbClr val="FFFFFF"/>
+                </a:solidFill>
+                <a:latin typeface="Meiryo" pitchFamily="34" charset="0"/>
+                <a:ea typeface="Meiryo" pitchFamily="34" charset="-122"/>
+                <a:cs typeface="Meiryo" pitchFamily="34" charset="-120"/>
+              </a:rPr>
+              <a:t>運営</a:t>
             </a:r>
             <a:endParaRPr lang="en-US" sz="900" dirty="0"/>
           </a:p>
@@ -3083,7 +3083,7 @@
                 <a:ea typeface="Consolas" pitchFamily="34" charset="-122"/>
                 <a:cs typeface="Consolas" pitchFamily="34" charset="-120"/>
               </a:rPr>
-              <a:t>→ 資料 02</a:t>
+              <a:t>→ 資料 01</a:t>
             </a:r>
             <a:endParaRPr lang="en-US" sz="1000" dirty="0"/>
           </a:p>
@@ -3193,7 +3193,7 @@
                 <a:ea typeface="Meiryo" pitchFamily="34" charset="-122"/>
                 <a:cs typeface="Meiryo" pitchFamily="34" charset="-120"/>
               </a:rPr>
-              <a:t>作る</a:t>
+              <a:t>参加・準備</a:t>
             </a:r>
             <a:endParaRPr lang="en-US" sz="1600" dirty="0"/>
           </a:p>
@@ -3235,7 +3235,7 @@
                 <a:ea typeface="Meiryo" pitchFamily="34" charset="-122"/>
                 <a:cs typeface="Meiryo" pitchFamily="34" charset="-120"/>
               </a:rPr>
-              <a:t>ブランチ → プルリクエスト → レビュー → マージ</a:t>
+              <a:t>サイトの「WG に参加」で入り、パソコンを準備する</a:t>
             </a:r>
             <a:endParaRPr lang="en-US" sz="1100" dirty="0"/>
           </a:p>
@@ -3340,7 +3340,7 @@
                 <a:ea typeface="Consolas" pitchFamily="34" charset="-122"/>
                 <a:cs typeface="Consolas" pitchFamily="34" charset="-120"/>
               </a:rPr>
-              <a:t>→ 資料 03</a:t>
+              <a:t>→ 資料 02</a:t>
             </a:r>
             <a:endParaRPr lang="en-US" sz="1000" dirty="0"/>
           </a:p>
@@ -3450,7 +3450,7 @@
                 <a:ea typeface="Meiryo" pitchFamily="34" charset="-122"/>
                 <a:cs typeface="Meiryo" pitchFamily="34" charset="-120"/>
               </a:rPr>
-              <a:t>公開</a:t>
+              <a:t>作って公開</a:t>
             </a:r>
             <a:endParaRPr lang="en-US" sz="1600" dirty="0"/>
           </a:p>
@@ -3492,7 +3492,7 @@
                 <a:ea typeface="Meiryo" pitchFamily="34" charset="-122"/>
                 <a:cs typeface="Meiryo" pitchFamily="34" charset="-120"/>
               </a:rPr>
-              <a:t>アプリを動かし、サイトの WG 一覧に載せる</a:t>
+              <a:t>ブランチ → PR → マージ。できたら「活動中」に</a:t>
             </a:r>
             <a:endParaRPr lang="en-US" sz="1100" dirty="0"/>
           </a:p>
@@ -3507,7 +3507,7 @@
         <p:spPr>
           <a:xfrm>
             <a:off x="7351776" y="3840480"/>
-            <a:ext cx="914400" cy="237744"/>
+            <a:ext cx="685800" cy="237744"/>
           </a:xfrm>
           <a:prstGeom prst="roundRect">
             <a:avLst>
@@ -3515,11 +3515,11 @@
             </a:avLst>
           </a:prstGeom>
           <a:solidFill>
-            <a:srgbClr val="001E3C"/>
+            <a:srgbClr val="5BB8FF"/>
           </a:solidFill>
           <a:ln w="12700">
             <a:solidFill>
-              <a:srgbClr val="001E3C"/>
+              <a:srgbClr val="5BB8FF"/>
             </a:solidFill>
             <a:prstDash val="solid"/>
           </a:ln>
@@ -3534,7 +3534,7 @@
         <p:spPr>
           <a:xfrm>
             <a:off x="7351776" y="3840480"/>
-            <a:ext cx="914400" cy="237744"/>
+            <a:ext cx="685800" cy="237744"/>
           </a:xfrm>
           <a:prstGeom prst="rect">
             <a:avLst/>
@@ -3552,13 +3552,13 @@
             <a:r>
               <a:rPr lang="en-US" sz="900" b="1" dirty="0">
                 <a:solidFill>
-                  <a:srgbClr val="FFFFFF"/>
-                </a:solidFill>
-                <a:latin typeface="Meiryo" pitchFamily="34" charset="0"/>
-                <a:ea typeface="Meiryo" pitchFamily="34" charset="-122"/>
-                <a:cs typeface="Meiryo" pitchFamily="34" charset="-120"/>
-              </a:rPr>
-              <a:t>運営 + WG</a:t>
+                  <a:srgbClr val="001E3C"/>
+                </a:solidFill>
+                <a:latin typeface="Meiryo" pitchFamily="34" charset="0"/>
+                <a:ea typeface="Meiryo" pitchFamily="34" charset="-122"/>
+                <a:cs typeface="Meiryo" pitchFamily="34" charset="-120"/>
+              </a:rPr>
+              <a:t>全員</a:t>
             </a:r>
             <a:endParaRPr lang="en-US" sz="900" dirty="0"/>
           </a:p>
@@ -3597,7 +3597,7 @@
                 <a:ea typeface="Consolas" pitchFamily="34" charset="-122"/>
                 <a:cs typeface="Consolas" pitchFamily="34" charset="-120"/>
               </a:rPr>
-              <a:t>→ 資料 01</a:t>
+              <a:t>→ 資料 03</a:t>
             </a:r>
             <a:endParaRPr lang="en-US" sz="1000" dirty="0"/>
           </a:p>
@@ -6362,7 +6362,7 @@
                 <a:ea typeface="Meiryo" pitchFamily="34" charset="-122"/>
                 <a:cs typeface="Meiryo" pitchFamily="34" charset="-120"/>
               </a:rPr>
-              <a:t>サイトの WG 一覧に「準備中」で載る。「WG に参加」で入れる。</a:t>
+              <a:t>立ち上げたらすぐ載る。アプリがまだでも「WG に参加」で入れる。</a:t>
             </a:r>
             <a:endParaRPr lang="en-US" sz="1100" dirty="0"/>
           </a:p>
@@ -6539,7 +6539,7 @@
                 <a:ea typeface="Meiryo" pitchFamily="34" charset="-122"/>
                 <a:cs typeface="Meiryo" pitchFamily="34" charset="-120"/>
               </a:rPr>
-              <a:t>アプリの URL と成果物をサイトに登録する。</a:t>
+              <a:t>アプリができたら「活動中」に変え、URL を登録する。</a:t>
             </a:r>
             <a:endParaRPr lang="en-US" sz="1100" dirty="0"/>
           </a:p>

--- a/docs/WG立ち上げガイド/00_概要.pptx
+++ b/docs/WG立ち上げガイド/00_概要.pptx
@@ -5742,7 +5742,7 @@
                 <a:ea typeface="Meiryo" pitchFamily="34" charset="-122"/>
                 <a:cs typeface="Meiryo" pitchFamily="34" charset="-120"/>
               </a:rPr>
-              <a:t>リポジトリは公開。消しても履歴に残る。.env に置く。</a:t>
+              <a:t>消しても履歴に残り、WG の全員が見られる。.env に置く。</a:t>
             </a:r>
             <a:endParaRPr lang="en-US" sz="1100" dirty="0"/>
           </a:p>
